--- a/_lectures/week10/ultrasonic_oled_parking.pptx
+++ b/_lectures/week10/ultrasonic_oled_parking.pptx
@@ -104,6 +104,11 @@
       </a:defRPr>
     </a:lvl9pPr>
   </p:defaultTextStyle>
+  <p:extLst>
+    <p:ext uri="{EFAFB233-063F-42B5-8137-9DF3F51BA10A}">
+      <p15:sldGuideLst xmlns:p15="http://schemas.microsoft.com/office/powerpoint/2012/main"/>
+    </p:ext>
+  </p:extLst>
 </p:presentation>
 </file>
 
@@ -254,7 +259,7 @@
           <a:p>
             <a:fld id="{D4659DA4-6681-4B22-B3FF-D0B2B4808C7A}" type="datetimeFigureOut">
               <a:rPr lang="en-US" smtClean="0"/>
-              <a:t>3/25/2026</a:t>
+              <a:t>10/28/2026</a:t>
             </a:fld>
             <a:endParaRPr lang="en-US"/>
           </a:p>
@@ -452,7 +457,7 @@
           <a:p>
             <a:fld id="{D4659DA4-6681-4B22-B3FF-D0B2B4808C7A}" type="datetimeFigureOut">
               <a:rPr lang="en-US" smtClean="0"/>
-              <a:t>3/25/2026</a:t>
+              <a:t>10/28/2026</a:t>
             </a:fld>
             <a:endParaRPr lang="en-US"/>
           </a:p>
@@ -660,7 +665,7 @@
           <a:p>
             <a:fld id="{D4659DA4-6681-4B22-B3FF-D0B2B4808C7A}" type="datetimeFigureOut">
               <a:rPr lang="en-US" smtClean="0"/>
-              <a:t>3/25/2026</a:t>
+              <a:t>10/28/2026</a:t>
             </a:fld>
             <a:endParaRPr lang="en-US"/>
           </a:p>
@@ -858,7 +863,7 @@
           <a:p>
             <a:fld id="{D4659DA4-6681-4B22-B3FF-D0B2B4808C7A}" type="datetimeFigureOut">
               <a:rPr lang="en-US" smtClean="0"/>
-              <a:t>3/25/2026</a:t>
+              <a:t>10/28/2026</a:t>
             </a:fld>
             <a:endParaRPr lang="en-US"/>
           </a:p>
@@ -1133,7 +1138,7 @@
           <a:p>
             <a:fld id="{D4659DA4-6681-4B22-B3FF-D0B2B4808C7A}" type="datetimeFigureOut">
               <a:rPr lang="en-US" smtClean="0"/>
-              <a:t>3/25/2026</a:t>
+              <a:t>10/28/2026</a:t>
             </a:fld>
             <a:endParaRPr lang="en-US"/>
           </a:p>
@@ -1398,7 +1403,7 @@
           <a:p>
             <a:fld id="{D4659DA4-6681-4B22-B3FF-D0B2B4808C7A}" type="datetimeFigureOut">
               <a:rPr lang="en-US" smtClean="0"/>
-              <a:t>3/25/2026</a:t>
+              <a:t>10/28/2026</a:t>
             </a:fld>
             <a:endParaRPr lang="en-US"/>
           </a:p>
@@ -1810,7 +1815,7 @@
           <a:p>
             <a:fld id="{D4659DA4-6681-4B22-B3FF-D0B2B4808C7A}" type="datetimeFigureOut">
               <a:rPr lang="en-US" smtClean="0"/>
-              <a:t>3/25/2026</a:t>
+              <a:t>10/28/2026</a:t>
             </a:fld>
             <a:endParaRPr lang="en-US"/>
           </a:p>
@@ -1951,7 +1956,7 @@
           <a:p>
             <a:fld id="{D4659DA4-6681-4B22-B3FF-D0B2B4808C7A}" type="datetimeFigureOut">
               <a:rPr lang="en-US" smtClean="0"/>
-              <a:t>3/25/2026</a:t>
+              <a:t>10/28/2026</a:t>
             </a:fld>
             <a:endParaRPr lang="en-US"/>
           </a:p>
@@ -2064,7 +2069,7 @@
           <a:p>
             <a:fld id="{D4659DA4-6681-4B22-B3FF-D0B2B4808C7A}" type="datetimeFigureOut">
               <a:rPr lang="en-US" smtClean="0"/>
-              <a:t>3/25/2026</a:t>
+              <a:t>10/28/2026</a:t>
             </a:fld>
             <a:endParaRPr lang="en-US"/>
           </a:p>
@@ -2375,7 +2380,7 @@
           <a:p>
             <a:fld id="{D4659DA4-6681-4B22-B3FF-D0B2B4808C7A}" type="datetimeFigureOut">
               <a:rPr lang="en-US" smtClean="0"/>
-              <a:t>3/25/2026</a:t>
+              <a:t>10/28/2026</a:t>
             </a:fld>
             <a:endParaRPr lang="en-US"/>
           </a:p>
@@ -2663,7 +2668,7 @@
           <a:p>
             <a:fld id="{D4659DA4-6681-4B22-B3FF-D0B2B4808C7A}" type="datetimeFigureOut">
               <a:rPr lang="en-US" smtClean="0"/>
-              <a:t>3/25/2026</a:t>
+              <a:t>10/28/2026</a:t>
             </a:fld>
             <a:endParaRPr lang="en-US"/>
           </a:p>
@@ -2904,7 +2909,7 @@
           <a:p>
             <a:fld id="{D4659DA4-6681-4B22-B3FF-D0B2B4808C7A}" type="datetimeFigureOut">
               <a:rPr lang="en-US" smtClean="0"/>
-              <a:t>3/25/2026</a:t>
+              <a:t>10/28/2026</a:t>
             </a:fld>
             <a:endParaRPr lang="en-US"/>
           </a:p>
@@ -3390,7 +3395,7 @@
           <p:nvPr>
             <p:extLst>
               <p:ext uri="{D42A27DB-BD31-4B8C-83A1-F6EECF244321}">
-                <p14:modId xmlns:p14="http://schemas.microsoft.com/office/powerpoint/2010/main" val="2313465490"/>
+                <p14:modId xmlns:p14="http://schemas.microsoft.com/office/powerpoint/2010/main" val="2390612786"/>
               </p:ext>
             </p:extLst>
           </p:nvPr>
@@ -3569,8 +3574,8 @@
         </p:nvSpPr>
         <p:spPr>
           <a:xfrm>
-            <a:off x="2029907" y="4167513"/>
-            <a:ext cx="317707" cy="494413"/>
+            <a:off x="2029907" y="4301414"/>
+            <a:ext cx="317707" cy="226612"/>
           </a:xfrm>
           <a:prstGeom prst="leftBrace">
             <a:avLst/>
@@ -3940,7 +3945,7 @@
           <a:p>
             <a:r>
               <a:rPr lang="en-US" dirty="0"/>
-              <a:t>6</a:t>
+              <a:t>4</a:t>
             </a:r>
           </a:p>
         </p:txBody>
@@ -3975,7 +3980,7 @@
           <a:p>
             <a:r>
               <a:rPr lang="en-US" dirty="0"/>
-              <a:t>62</a:t>
+              <a:t>60</a:t>
             </a:r>
           </a:p>
         </p:txBody>
